--- a/assets/images.pptx
+++ b/assets/images.pptx
@@ -6,6 +6,7 @@
   </p:sldMasterIdLst>
   <p:sldIdLst>
     <p:sldId id="256" r:id="rId2"/>
+    <p:sldId id="257" r:id="rId3"/>
   </p:sldIdLst>
   <p:sldSz cx="12192000" cy="6858000"/>
   <p:notesSz cx="6858000" cy="9144000"/>
@@ -243,7 +244,7 @@
           <a:p>
             <a:fld id="{63D41197-B298-471E-AC65-5CD7BDBC8E13}" type="datetimeFigureOut">
               <a:rPr lang="ko-KR" altLang="en-US" smtClean="0"/>
-              <a:t>2026-04-20</a:t>
+              <a:t>2026-04-21</a:t>
             </a:fld>
             <a:endParaRPr lang="ko-KR" altLang="en-US"/>
           </a:p>
@@ -413,7 +414,7 @@
           <a:p>
             <a:fld id="{63D41197-B298-471E-AC65-5CD7BDBC8E13}" type="datetimeFigureOut">
               <a:rPr lang="ko-KR" altLang="en-US" smtClean="0"/>
-              <a:t>2026-04-20</a:t>
+              <a:t>2026-04-21</a:t>
             </a:fld>
             <a:endParaRPr lang="ko-KR" altLang="en-US"/>
           </a:p>
@@ -593,7 +594,7 @@
           <a:p>
             <a:fld id="{63D41197-B298-471E-AC65-5CD7BDBC8E13}" type="datetimeFigureOut">
               <a:rPr lang="ko-KR" altLang="en-US" smtClean="0"/>
-              <a:t>2026-04-20</a:t>
+              <a:t>2026-04-21</a:t>
             </a:fld>
             <a:endParaRPr lang="ko-KR" altLang="en-US"/>
           </a:p>
@@ -763,7 +764,7 @@
           <a:p>
             <a:fld id="{63D41197-B298-471E-AC65-5CD7BDBC8E13}" type="datetimeFigureOut">
               <a:rPr lang="ko-KR" altLang="en-US" smtClean="0"/>
-              <a:t>2026-04-20</a:t>
+              <a:t>2026-04-21</a:t>
             </a:fld>
             <a:endParaRPr lang="ko-KR" altLang="en-US"/>
           </a:p>
@@ -1009,7 +1010,7 @@
           <a:p>
             <a:fld id="{63D41197-B298-471E-AC65-5CD7BDBC8E13}" type="datetimeFigureOut">
               <a:rPr lang="ko-KR" altLang="en-US" smtClean="0"/>
-              <a:t>2026-04-20</a:t>
+              <a:t>2026-04-21</a:t>
             </a:fld>
             <a:endParaRPr lang="ko-KR" altLang="en-US"/>
           </a:p>
@@ -1241,7 +1242,7 @@
           <a:p>
             <a:fld id="{63D41197-B298-471E-AC65-5CD7BDBC8E13}" type="datetimeFigureOut">
               <a:rPr lang="ko-KR" altLang="en-US" smtClean="0"/>
-              <a:t>2026-04-20</a:t>
+              <a:t>2026-04-21</a:t>
             </a:fld>
             <a:endParaRPr lang="ko-KR" altLang="en-US"/>
           </a:p>
@@ -1608,7 +1609,7 @@
           <a:p>
             <a:fld id="{63D41197-B298-471E-AC65-5CD7BDBC8E13}" type="datetimeFigureOut">
               <a:rPr lang="ko-KR" altLang="en-US" smtClean="0"/>
-              <a:t>2026-04-20</a:t>
+              <a:t>2026-04-21</a:t>
             </a:fld>
             <a:endParaRPr lang="ko-KR" altLang="en-US"/>
           </a:p>
@@ -1726,7 +1727,7 @@
           <a:p>
             <a:fld id="{63D41197-B298-471E-AC65-5CD7BDBC8E13}" type="datetimeFigureOut">
               <a:rPr lang="ko-KR" altLang="en-US" smtClean="0"/>
-              <a:t>2026-04-20</a:t>
+              <a:t>2026-04-21</a:t>
             </a:fld>
             <a:endParaRPr lang="ko-KR" altLang="en-US"/>
           </a:p>
@@ -1821,7 +1822,7 @@
           <a:p>
             <a:fld id="{63D41197-B298-471E-AC65-5CD7BDBC8E13}" type="datetimeFigureOut">
               <a:rPr lang="ko-KR" altLang="en-US" smtClean="0"/>
-              <a:t>2026-04-20</a:t>
+              <a:t>2026-04-21</a:t>
             </a:fld>
             <a:endParaRPr lang="ko-KR" altLang="en-US"/>
           </a:p>
@@ -2098,7 +2099,7 @@
           <a:p>
             <a:fld id="{63D41197-B298-471E-AC65-5CD7BDBC8E13}" type="datetimeFigureOut">
               <a:rPr lang="ko-KR" altLang="en-US" smtClean="0"/>
-              <a:t>2026-04-20</a:t>
+              <a:t>2026-04-21</a:t>
             </a:fld>
             <a:endParaRPr lang="ko-KR" altLang="en-US"/>
           </a:p>
@@ -2351,7 +2352,7 @@
           <a:p>
             <a:fld id="{63D41197-B298-471E-AC65-5CD7BDBC8E13}" type="datetimeFigureOut">
               <a:rPr lang="ko-KR" altLang="en-US" smtClean="0"/>
-              <a:t>2026-04-20</a:t>
+              <a:t>2026-04-21</a:t>
             </a:fld>
             <a:endParaRPr lang="ko-KR" altLang="en-US"/>
           </a:p>
@@ -2564,7 +2565,7 @@
           <a:p>
             <a:fld id="{63D41197-B298-471E-AC65-5CD7BDBC8E13}" type="datetimeFigureOut">
               <a:rPr lang="ko-KR" altLang="en-US" smtClean="0"/>
-              <a:t>2026-04-20</a:t>
+              <a:t>2026-04-21</a:t>
             </a:fld>
             <a:endParaRPr lang="ko-KR" altLang="en-US"/>
           </a:p>
@@ -3052,10 +3053,394 @@
           </a:prstGeom>
         </p:spPr>
       </p:pic>
+      <p:grpSp>
+        <p:nvGrpSpPr>
+          <p:cNvPr id="8" name="그룹 7"/>
+          <p:cNvGrpSpPr/>
+          <p:nvPr/>
+        </p:nvGrpSpPr>
+        <p:grpSpPr>
+          <a:xfrm>
+            <a:off x="6708710" y="3905807"/>
+            <a:ext cx="5397381" cy="2550977"/>
+            <a:chOff x="6708710" y="3905807"/>
+            <a:chExt cx="5397381" cy="2550977"/>
+          </a:xfrm>
+        </p:grpSpPr>
+        <p:pic>
+          <p:nvPicPr>
+            <p:cNvPr id="2" name="그림 1"/>
+            <p:cNvPicPr>
+              <a:picLocks noChangeAspect="1"/>
+            </p:cNvPicPr>
+            <p:nvPr/>
+          </p:nvPicPr>
+          <p:blipFill>
+            <a:blip r:embed="rId5"/>
+            <a:stretch>
+              <a:fillRect/>
+            </a:stretch>
+          </p:blipFill>
+          <p:spPr>
+            <a:xfrm>
+              <a:off x="6856007" y="4327941"/>
+              <a:ext cx="5176436" cy="1790685"/>
+            </a:xfrm>
+            <a:prstGeom prst="rect">
+              <a:avLst/>
+            </a:prstGeom>
+          </p:spPr>
+        </p:pic>
+        <p:sp>
+          <p:nvSpPr>
+            <p:cNvPr id="3" name="직사각형 2"/>
+            <p:cNvSpPr/>
+            <p:nvPr/>
+          </p:nvSpPr>
+          <p:spPr>
+            <a:xfrm>
+              <a:off x="6708710" y="3905807"/>
+              <a:ext cx="5323733" cy="503853"/>
+            </a:xfrm>
+            <a:prstGeom prst="rect">
+              <a:avLst/>
+            </a:prstGeom>
+            <a:solidFill>
+              <a:schemeClr val="bg1"/>
+            </a:solidFill>
+            <a:ln>
+              <a:noFill/>
+            </a:ln>
+          </p:spPr>
+          <p:style>
+            <a:lnRef idx="2">
+              <a:schemeClr val="accent1">
+                <a:shade val="50000"/>
+              </a:schemeClr>
+            </a:lnRef>
+            <a:fillRef idx="1">
+              <a:schemeClr val="accent1"/>
+            </a:fillRef>
+            <a:effectRef idx="0">
+              <a:schemeClr val="accent1"/>
+            </a:effectRef>
+            <a:fontRef idx="minor">
+              <a:schemeClr val="lt1"/>
+            </a:fontRef>
+          </p:style>
+          <p:txBody>
+            <a:bodyPr rtlCol="0" anchor="ctr"/>
+            <a:lstStyle/>
+            <a:p>
+              <a:pPr algn="ctr"/>
+              <a:endParaRPr lang="ko-KR" altLang="en-US"/>
+            </a:p>
+          </p:txBody>
+        </p:sp>
+        <p:sp>
+          <p:nvSpPr>
+            <p:cNvPr id="7" name="직사각형 6"/>
+            <p:cNvSpPr/>
+            <p:nvPr/>
+          </p:nvSpPr>
+          <p:spPr>
+            <a:xfrm>
+              <a:off x="6782358" y="6033187"/>
+              <a:ext cx="5323733" cy="423597"/>
+            </a:xfrm>
+            <a:prstGeom prst="rect">
+              <a:avLst/>
+            </a:prstGeom>
+            <a:solidFill>
+              <a:schemeClr val="bg1"/>
+            </a:solidFill>
+            <a:ln>
+              <a:noFill/>
+            </a:ln>
+          </p:spPr>
+          <p:style>
+            <a:lnRef idx="2">
+              <a:schemeClr val="accent1">
+                <a:shade val="50000"/>
+              </a:schemeClr>
+            </a:lnRef>
+            <a:fillRef idx="1">
+              <a:schemeClr val="accent1"/>
+            </a:fillRef>
+            <a:effectRef idx="0">
+              <a:schemeClr val="accent1"/>
+            </a:effectRef>
+            <a:fontRef idx="minor">
+              <a:schemeClr val="lt1"/>
+            </a:fontRef>
+          </p:style>
+          <p:txBody>
+            <a:bodyPr rtlCol="0" anchor="ctr"/>
+            <a:lstStyle/>
+            <a:p>
+              <a:pPr algn="ctr"/>
+              <a:endParaRPr lang="ko-KR" altLang="en-US"/>
+            </a:p>
+          </p:txBody>
+        </p:sp>
+      </p:grpSp>
     </p:spTree>
     <p:extLst>
       <p:ext uri="{BB962C8B-B14F-4D97-AF65-F5344CB8AC3E}">
         <p14:creationId xmlns:p14="http://schemas.microsoft.com/office/powerpoint/2010/main" val="873268649"/>
+      </p:ext>
+    </p:extLst>
+  </p:cSld>
+  <p:clrMapOvr>
+    <a:masterClrMapping/>
+  </p:clrMapOvr>
+</p:sld>
+</file>
+
+<file path=ppt/slides/slide2.xml><?xml version="1.0" encoding="utf-8"?>
+<p:sld xmlns:a="http://schemas.openxmlformats.org/drawingml/2006/main" xmlns:r="http://schemas.openxmlformats.org/officeDocument/2006/relationships" xmlns:p="http://schemas.openxmlformats.org/presentationml/2006/main">
+  <p:cSld>
+    <p:spTree>
+      <p:nvGrpSpPr>
+        <p:cNvPr id="1" name=""/>
+        <p:cNvGrpSpPr/>
+        <p:nvPr/>
+      </p:nvGrpSpPr>
+      <p:grpSpPr>
+        <a:xfrm>
+          <a:off x="0" y="0"/>
+          <a:ext cx="0" cy="0"/>
+          <a:chOff x="0" y="0"/>
+          <a:chExt cx="0" cy="0"/>
+        </a:xfrm>
+      </p:grpSpPr>
+      <p:grpSp>
+        <p:nvGrpSpPr>
+          <p:cNvPr id="14" name="그룹 13"/>
+          <p:cNvGrpSpPr/>
+          <p:nvPr/>
+        </p:nvGrpSpPr>
+        <p:grpSpPr>
+          <a:xfrm>
+            <a:off x="1433004" y="867747"/>
+            <a:ext cx="4495404" cy="2995126"/>
+            <a:chOff x="1433004" y="867747"/>
+            <a:chExt cx="5223632" cy="3480318"/>
+          </a:xfrm>
+        </p:grpSpPr>
+        <p:pic>
+          <p:nvPicPr>
+            <p:cNvPr id="9" name="그림 8"/>
+            <p:cNvPicPr>
+              <a:picLocks noChangeAspect="1"/>
+            </p:cNvPicPr>
+            <p:nvPr/>
+          </p:nvPicPr>
+          <p:blipFill>
+            <a:blip r:embed="rId2"/>
+            <a:stretch>
+              <a:fillRect/>
+            </a:stretch>
+          </p:blipFill>
+          <p:spPr>
+            <a:xfrm>
+              <a:off x="1791477" y="1164090"/>
+              <a:ext cx="4610078" cy="2808000"/>
+            </a:xfrm>
+            <a:prstGeom prst="rect">
+              <a:avLst/>
+            </a:prstGeom>
+          </p:spPr>
+        </p:pic>
+        <p:sp>
+          <p:nvSpPr>
+            <p:cNvPr id="10" name="직사각형 9"/>
+            <p:cNvSpPr/>
+            <p:nvPr/>
+          </p:nvSpPr>
+          <p:spPr>
+            <a:xfrm>
+              <a:off x="1548882" y="867747"/>
+              <a:ext cx="5057191" cy="296343"/>
+            </a:xfrm>
+            <a:prstGeom prst="rect">
+              <a:avLst/>
+            </a:prstGeom>
+            <a:solidFill>
+              <a:schemeClr val="bg1"/>
+            </a:solidFill>
+            <a:ln>
+              <a:noFill/>
+            </a:ln>
+          </p:spPr>
+          <p:style>
+            <a:lnRef idx="2">
+              <a:schemeClr val="accent1">
+                <a:shade val="50000"/>
+              </a:schemeClr>
+            </a:lnRef>
+            <a:fillRef idx="1">
+              <a:schemeClr val="accent1"/>
+            </a:fillRef>
+            <a:effectRef idx="0">
+              <a:schemeClr val="accent1"/>
+            </a:effectRef>
+            <a:fontRef idx="minor">
+              <a:schemeClr val="lt1"/>
+            </a:fontRef>
+          </p:style>
+          <p:txBody>
+            <a:bodyPr rtlCol="0" anchor="ctr"/>
+            <a:lstStyle/>
+            <a:p>
+              <a:pPr algn="ctr"/>
+              <a:endParaRPr lang="ko-KR" altLang="en-US"/>
+            </a:p>
+          </p:txBody>
+        </p:sp>
+        <p:sp>
+          <p:nvSpPr>
+            <p:cNvPr id="11" name="직사각형 10"/>
+            <p:cNvSpPr/>
+            <p:nvPr/>
+          </p:nvSpPr>
+          <p:spPr>
+            <a:xfrm>
+              <a:off x="1433004" y="998376"/>
+              <a:ext cx="307910" cy="3349689"/>
+            </a:xfrm>
+            <a:prstGeom prst="rect">
+              <a:avLst/>
+            </a:prstGeom>
+            <a:solidFill>
+              <a:schemeClr val="bg1"/>
+            </a:solidFill>
+            <a:ln>
+              <a:noFill/>
+            </a:ln>
+          </p:spPr>
+          <p:style>
+            <a:lnRef idx="2">
+              <a:schemeClr val="accent1">
+                <a:shade val="50000"/>
+              </a:schemeClr>
+            </a:lnRef>
+            <a:fillRef idx="1">
+              <a:schemeClr val="accent1"/>
+            </a:fillRef>
+            <a:effectRef idx="0">
+              <a:schemeClr val="accent1"/>
+            </a:effectRef>
+            <a:fontRef idx="minor">
+              <a:schemeClr val="lt1"/>
+            </a:fontRef>
+          </p:style>
+          <p:txBody>
+            <a:bodyPr rtlCol="0" anchor="ctr"/>
+            <a:lstStyle/>
+            <a:p>
+              <a:pPr algn="ctr"/>
+              <a:endParaRPr lang="ko-KR" altLang="en-US"/>
+            </a:p>
+          </p:txBody>
+        </p:sp>
+        <p:sp>
+          <p:nvSpPr>
+            <p:cNvPr id="12" name="직사각형 11"/>
+            <p:cNvSpPr/>
+            <p:nvPr/>
+          </p:nvSpPr>
+          <p:spPr>
+            <a:xfrm>
+              <a:off x="6348726" y="998376"/>
+              <a:ext cx="307910" cy="3349689"/>
+            </a:xfrm>
+            <a:prstGeom prst="rect">
+              <a:avLst/>
+            </a:prstGeom>
+            <a:solidFill>
+              <a:schemeClr val="bg1"/>
+            </a:solidFill>
+            <a:ln>
+              <a:noFill/>
+            </a:ln>
+          </p:spPr>
+          <p:style>
+            <a:lnRef idx="2">
+              <a:schemeClr val="accent1">
+                <a:shade val="50000"/>
+              </a:schemeClr>
+            </a:lnRef>
+            <a:fillRef idx="1">
+              <a:schemeClr val="accent1"/>
+            </a:fillRef>
+            <a:effectRef idx="0">
+              <a:schemeClr val="accent1"/>
+            </a:effectRef>
+            <a:fontRef idx="minor">
+              <a:schemeClr val="lt1"/>
+            </a:fontRef>
+          </p:style>
+          <p:txBody>
+            <a:bodyPr rtlCol="0" anchor="ctr"/>
+            <a:lstStyle/>
+            <a:p>
+              <a:pPr algn="ctr"/>
+              <a:endParaRPr lang="ko-KR" altLang="en-US"/>
+            </a:p>
+          </p:txBody>
+        </p:sp>
+        <p:sp>
+          <p:nvSpPr>
+            <p:cNvPr id="13" name="직사각형 12"/>
+            <p:cNvSpPr/>
+            <p:nvPr/>
+          </p:nvSpPr>
+          <p:spPr>
+            <a:xfrm>
+              <a:off x="1541506" y="3989632"/>
+              <a:ext cx="5057191" cy="299699"/>
+            </a:xfrm>
+            <a:prstGeom prst="rect">
+              <a:avLst/>
+            </a:prstGeom>
+            <a:solidFill>
+              <a:schemeClr val="bg1"/>
+            </a:solidFill>
+            <a:ln>
+              <a:noFill/>
+            </a:ln>
+          </p:spPr>
+          <p:style>
+            <a:lnRef idx="2">
+              <a:schemeClr val="accent1">
+                <a:shade val="50000"/>
+              </a:schemeClr>
+            </a:lnRef>
+            <a:fillRef idx="1">
+              <a:schemeClr val="accent1"/>
+            </a:fillRef>
+            <a:effectRef idx="0">
+              <a:schemeClr val="accent1"/>
+            </a:effectRef>
+            <a:fontRef idx="minor">
+              <a:schemeClr val="lt1"/>
+            </a:fontRef>
+          </p:style>
+          <p:txBody>
+            <a:bodyPr rtlCol="0" anchor="ctr"/>
+            <a:lstStyle/>
+            <a:p>
+              <a:pPr algn="ctr"/>
+              <a:endParaRPr lang="ko-KR" altLang="en-US"/>
+            </a:p>
+          </p:txBody>
+        </p:sp>
+      </p:grpSp>
+    </p:spTree>
+    <p:extLst>
+      <p:ext uri="{BB962C8B-B14F-4D97-AF65-F5344CB8AC3E}">
+        <p14:creationId xmlns:p14="http://schemas.microsoft.com/office/powerpoint/2010/main" val="1164273596"/>
       </p:ext>
     </p:extLst>
   </p:cSld>
